--- a/dist/초2/수학/수와계산/초2_수학_수와계산_02_네자리수.pptx
+++ b/dist/초2/수학/수와계산/초2_수학_수와계산_02_네자리수.pptx
@@ -122,13 +122,13 @@
   <p:extLst>
     <p:ext uri="{521415D9-36F7-43E2-AB2F-B90AF26B5E84}">
       <p14:sectionLst xmlns:p14="http://schemas.microsoft.com/office/powerpoint/2010/main">
-        <p14:section name="도입" id="{b41957fb-07a0-727c-f540-c99d2e638f31}">
+        <p14:section name="도입" id="{5b09682d-422f-5056-0931-37af6f10f8fe}">
           <p14:sldIdLst>
             <p14:sldId id="256"/>
             <p14:sldId id="257"/>
           </p14:sldIdLst>
         </p14:section>
-        <p14:section name="개념" id="{4570bfc1-35eb-9077-fbed-66bddaafe402}">
+        <p14:section name="개념" id="{844ab555-c8b0-8d0d-acad-f9e0ab4e24e9}">
           <p14:sldIdLst>
             <p14:sldId id="258"/>
             <p14:sldId id="259"/>
@@ -138,32 +138,32 @@
             <p14:sldId id="264"/>
           </p14:sldIdLst>
         </p14:section>
-        <p14:section name="연습" id="{a6053cdc-4b3c-449d-d3cd-0e7b69b274d5}">
+        <p14:section name="연습" id="{3fe86ed1-5703-061c-59c0-abb797fdd12d}">
           <p14:sldIdLst>
             <p14:sldId id="262"/>
             <p14:sldId id="265"/>
             <p14:sldId id="266"/>
           </p14:sldIdLst>
         </p14:section>
-        <p14:section name="개념" id="{9eb117d3-ed3d-c365-97c9-4ebe52d7d67f}">
+        <p14:section name="개념" id="{fd983a1d-b826-3f77-4d5e-04802e5dbae5}">
           <p14:sldIdLst/>
         </p14:section>
-        <p14:section name="연습" id="{1f536ef7-074a-7ef6-76ef-7cc8c7bbe165}">
+        <p14:section name="연습" id="{eb6a1eda-f2bd-698e-02ca-93cdd43f481a}">
           <p14:sldIdLst/>
         </p14:section>
-        <p14:section name="확인" id="{b11643da-101b-f29e-a79c-e86031afb875}">
+        <p14:section name="확인" id="{b0b53107-0e3e-ba27-b418-dcb689c95085}">
           <p14:sldIdLst>
             <p14:sldId id="267"/>
             <p14:sldId id="268"/>
             <p14:sldId id="269"/>
           </p14:sldIdLst>
         </p14:section>
-        <p14:section name="정리" id="{6592d90b-8ece-c6f9-d676-faf31ce5298d}">
+        <p14:section name="정리" id="{80b73f5a-98b5-af3d-8c71-5de16eceda10}">
           <p14:sldIdLst>
             <p14:sldId id="270"/>
           </p14:sldIdLst>
         </p14:section>
-        <p14:section name="보충" id="{392c5e14-3f88-b6ce-5133-99391bd7d818}">
+        <p14:section name="보충" id="{647167cf-3d15-fe3c-8c79-b8f9ff46d091}">
           <p14:sldIdLst>
             <p14:sldId id="271"/>
           </p14:sldIdLst>
@@ -3239,7 +3239,7 @@
           </p:nvPr>
         </p:nvGraphicFramePr>
         <p:xfrm>
-          <a:off x="7680960" y="1452880"/>
+          <a:off x="7680960" y="1473200"/>
           <a:ext cx="3931920" cy="914400"/>
         </p:xfrm>
         <a:graphic>
@@ -3252,7 +3252,7 @@
                 <a:gridCol w="982980"/>
                 <a:gridCol w="982980"/>
               </a:tblGrid>
-              <a:tr h="650240">
+              <a:tr h="629920">
                 <a:tc>
                   <a:txBody>
                     <a:bodyPr/>
@@ -3526,7 +3526,7 @@
                   </a:tcPr>
                 </a:tc>
               </a:tr>
-              <a:tr h="650240">
+              <a:tr h="629920">
                 <a:tc>
                   <a:txBody>
                     <a:bodyPr/>
@@ -5875,7 +5875,7 @@
               <a:buNone/>
             </a:pPr>
             <a:r>
-              <a:rPr lang="ko-KR" altLang="en-US" sz="2600" dirty="0">
+              <a:rPr lang="en-US" altLang="ko-KR" sz="2600" dirty="0">
                 <a:solidFill>
                   <a:srgbClr val="1F2937"/>
                 </a:solidFill>
@@ -6078,7 +6078,7 @@
               <a:buNone/>
             </a:pPr>
             <a:r>
-              <a:rPr lang="ko-KR" altLang="en-US" sz="3200" dirty="0">
+              <a:rPr lang="en-US" altLang="ko-KR" sz="3200" dirty="0">
                 <a:solidFill>
                   <a:srgbClr val="1F2937"/>
                 </a:solidFill>
@@ -9276,7 +9276,7 @@
           </p:nvPr>
         </p:nvGraphicFramePr>
         <p:xfrm>
-          <a:off x="6615684" y="2430780"/>
+          <a:off x="6615684" y="2455545"/>
           <a:ext cx="4663440" cy="914400"/>
         </p:xfrm>
         <a:graphic>
@@ -9288,7 +9288,7 @@
                 <a:gridCol w="1554480"/>
                 <a:gridCol w="1554480"/>
               </a:tblGrid>
-              <a:tr h="528320">
+              <a:tr h="511810">
                 <a:tc>
                   <a:txBody>
                     <a:bodyPr/>
@@ -9494,7 +9494,7 @@
                   </a:tcPr>
                 </a:tc>
               </a:tr>
-              <a:tr h="528320">
+              <a:tr h="511810">
                 <a:tc>
                   <a:txBody>
                     <a:bodyPr/>
@@ -9700,7 +9700,7 @@
                   </a:tcPr>
                 </a:tc>
               </a:tr>
-              <a:tr h="528320">
+              <a:tr h="511810">
                 <a:tc>
                   <a:txBody>
                     <a:bodyPr/>
@@ -15279,7 +15279,7 @@
           </p:nvPr>
         </p:nvGraphicFramePr>
         <p:xfrm>
-          <a:off x="2436876" y="2042160"/>
+          <a:off x="2436876" y="2089785"/>
           <a:ext cx="7315200" cy="914400"/>
         </p:xfrm>
         <a:graphic>
@@ -15291,7 +15291,7 @@
                 <a:gridCol w="2414016"/>
                 <a:gridCol w="2414016"/>
               </a:tblGrid>
-              <a:tr h="609600">
+              <a:tr h="590550">
                 <a:tc>
                   <a:txBody>
                     <a:bodyPr/>
@@ -15497,7 +15497,7 @@
                   </a:tcPr>
                 </a:tc>
               </a:tr>
-              <a:tr h="609600">
+              <a:tr h="590550">
                 <a:tc>
                   <a:txBody>
                     <a:bodyPr/>
@@ -15703,7 +15703,7 @@
                   </a:tcPr>
                 </a:tc>
               </a:tr>
-              <a:tr h="609600">
+              <a:tr h="590550">
                 <a:tc>
                   <a:txBody>
                     <a:bodyPr/>
@@ -15909,7 +15909,7 @@
                   </a:tcPr>
                 </a:tc>
               </a:tr>
-              <a:tr h="609600">
+              <a:tr h="590550">
                 <a:tc>
                   <a:txBody>
                     <a:bodyPr/>
@@ -16115,7 +16115,7 @@
                   </a:tcPr>
                 </a:tc>
               </a:tr>
-              <a:tr h="609600">
+              <a:tr h="590550">
                 <a:tc>
                   <a:txBody>
                     <a:bodyPr/>
@@ -16582,7 +16582,7 @@
           </p:nvPr>
         </p:nvGraphicFramePr>
         <p:xfrm>
-          <a:off x="2985516" y="2556002"/>
+          <a:off x="2985516" y="2580767"/>
           <a:ext cx="6217920" cy="914400"/>
         </p:xfrm>
         <a:graphic>
@@ -16595,7 +16595,7 @@
                 <a:gridCol w="1554480"/>
                 <a:gridCol w="1554480"/>
               </a:tblGrid>
-              <a:tr h="528320">
+              <a:tr h="511810">
                 <a:tc>
                   <a:txBody>
                     <a:bodyPr/>
@@ -16869,7 +16869,7 @@
                   </a:tcPr>
                 </a:tc>
               </a:tr>
-              <a:tr h="528320">
+              <a:tr h="511810">
                 <a:tc>
                   <a:txBody>
                     <a:bodyPr/>
@@ -17143,7 +17143,7 @@
                   </a:tcPr>
                 </a:tc>
               </a:tr>
-              <a:tr h="528320">
+              <a:tr h="511810">
                 <a:tc>
                   <a:txBody>
                     <a:bodyPr/>
@@ -17678,7 +17678,7 @@
           </p:nvPr>
         </p:nvGraphicFramePr>
         <p:xfrm>
-          <a:off x="2985516" y="2820162"/>
+          <a:off x="2985516" y="2836672"/>
           <a:ext cx="6217920" cy="914400"/>
         </p:xfrm>
         <a:graphic>
@@ -17691,7 +17691,7 @@
                 <a:gridCol w="1554480"/>
                 <a:gridCol w="1554480"/>
               </a:tblGrid>
-              <a:tr h="528320">
+              <a:tr h="511810">
                 <a:tc>
                   <a:txBody>
                     <a:bodyPr/>
@@ -17965,7 +17965,7 @@
                   </a:tcPr>
                 </a:tc>
               </a:tr>
-              <a:tr h="528320">
+              <a:tr h="511810">
                 <a:tc>
                   <a:txBody>
                     <a:bodyPr/>
@@ -19007,7 +19007,7 @@
           </p:nvPr>
         </p:nvGraphicFramePr>
         <p:xfrm>
-          <a:off x="1522476" y="2042160"/>
+          <a:off x="1522476" y="2089785"/>
           <a:ext cx="9144000" cy="914400"/>
         </p:xfrm>
         <a:graphic>
@@ -19018,7 +19018,7 @@
                 <a:gridCol w="2286000"/>
                 <a:gridCol w="6858000"/>
               </a:tblGrid>
-              <a:tr h="609600">
+              <a:tr h="590550">
                 <a:tc>
                   <a:txBody>
                     <a:bodyPr/>
@@ -19156,7 +19156,7 @@
                   </a:tcPr>
                 </a:tc>
               </a:tr>
-              <a:tr h="609600">
+              <a:tr h="590550">
                 <a:tc>
                   <a:txBody>
                     <a:bodyPr/>
@@ -19294,7 +19294,7 @@
                   </a:tcPr>
                 </a:tc>
               </a:tr>
-              <a:tr h="609600">
+              <a:tr h="590550">
                 <a:tc>
                   <a:txBody>
                     <a:bodyPr/>
@@ -19432,7 +19432,7 @@
                   </a:tcPr>
                 </a:tc>
               </a:tr>
-              <a:tr h="609600">
+              <a:tr h="590550">
                 <a:tc>
                   <a:txBody>
                     <a:bodyPr/>
@@ -19570,7 +19570,7 @@
                   </a:tcPr>
                 </a:tc>
               </a:tr>
-              <a:tr h="609600">
+              <a:tr h="590550">
                 <a:tc>
                   <a:txBody>
                     <a:bodyPr/>
@@ -19920,7 +19920,7 @@
               <a:buNone/>
             </a:pPr>
             <a:r>
-              <a:rPr lang="ko-KR" altLang="en-US" sz="3200" b="1" dirty="0">
+              <a:rPr lang="en-US" altLang="ko-KR" sz="3200" b="1" dirty="0">
                 <a:solidFill>
                   <a:srgbClr val="1F2937"/>
                 </a:solidFill>
@@ -19969,7 +19969,7 @@
           </p:nvPr>
         </p:nvGraphicFramePr>
         <p:xfrm>
-          <a:off x="2208276" y="2373122"/>
+          <a:off x="2208276" y="2403602"/>
           <a:ext cx="7772400" cy="914400"/>
         </p:xfrm>
         <a:graphic>
@@ -19983,7 +19983,7 @@
                 <a:gridCol w="1554480"/>
                 <a:gridCol w="1554480"/>
               </a:tblGrid>
-              <a:tr h="650240">
+              <a:tr h="629920">
                 <a:tc>
                   <a:txBody>
                     <a:bodyPr/>
@@ -20325,7 +20325,7 @@
                   </a:tcPr>
                 </a:tc>
               </a:tr>
-              <a:tr h="650240">
+              <a:tr h="629920">
                 <a:tc>
                   <a:txBody>
                     <a:bodyPr/>
@@ -20667,7 +20667,7 @@
                   </a:tcPr>
                 </a:tc>
               </a:tr>
-              <a:tr h="650240">
+              <a:tr h="629920">
                 <a:tc>
                   <a:txBody>
                     <a:bodyPr/>
